--- a/TempateEvent State Machine .pptx
+++ b/TempateEvent State Machine .pptx
@@ -3429,7 +3429,7 @@
           <a:bodyPr/>
           <a:lstStyle/>
           <a:p>
-            <a:endParaRPr lang="en-US"/>
+            <a:endParaRPr lang="en-US" dirty="0"/>
           </a:p>
         </p:txBody>
       </p:sp>
@@ -3457,8 +3457,8 @@
         </p:blipFill>
         <p:spPr>
           <a:xfrm>
-            <a:off x="1990725" y="1901031"/>
-            <a:ext cx="8210550" cy="4200525"/>
+            <a:off x="344804" y="365125"/>
+            <a:ext cx="11157785" cy="5708333"/>
           </a:xfrm>
           <a:prstGeom prst="rect">
             <a:avLst/>

--- a/TempateEvent State Machine .pptx
+++ b/TempateEvent State Machine .pptx
@@ -5,13 +5,19 @@
     <p:sldMasterId id="2147483648" r:id="rId1"/>
   </p:sldMasterIdLst>
   <p:sldIdLst>
-    <p:sldId id="262" r:id="rId2"/>
-    <p:sldId id="263" r:id="rId3"/>
-    <p:sldId id="258" r:id="rId4"/>
-    <p:sldId id="260" r:id="rId5"/>
-    <p:sldId id="261" r:id="rId6"/>
-    <p:sldId id="256" r:id="rId7"/>
-    <p:sldId id="257" r:id="rId8"/>
+    <p:sldId id="264" r:id="rId2"/>
+    <p:sldId id="265" r:id="rId3"/>
+    <p:sldId id="266" r:id="rId4"/>
+    <p:sldId id="267" r:id="rId5"/>
+    <p:sldId id="268" r:id="rId6"/>
+    <p:sldId id="269" r:id="rId7"/>
+    <p:sldId id="262" r:id="rId8"/>
+    <p:sldId id="263" r:id="rId9"/>
+    <p:sldId id="258" r:id="rId10"/>
+    <p:sldId id="260" r:id="rId11"/>
+    <p:sldId id="261" r:id="rId12"/>
+    <p:sldId id="256" r:id="rId13"/>
+    <p:sldId id="257" r:id="rId14"/>
   </p:sldIdLst>
   <p:sldSz cx="12192000" cy="6858000"/>
   <p:notesSz cx="6858000" cy="9144000"/>
@@ -265,7 +271,7 @@
           <a:p>
             <a:fld id="{AC601F0D-9A74-4BCF-936C-28269B3A442B}" type="datetimeFigureOut">
               <a:rPr lang="en-US" smtClean="0"/>
-              <a:t>8/28/2026</a:t>
+              <a:t>8/29/2026</a:t>
             </a:fld>
             <a:endParaRPr lang="en-US"/>
           </a:p>
@@ -463,7 +469,7 @@
           <a:p>
             <a:fld id="{AC601F0D-9A74-4BCF-936C-28269B3A442B}" type="datetimeFigureOut">
               <a:rPr lang="en-US" smtClean="0"/>
-              <a:t>8/28/2026</a:t>
+              <a:t>8/29/2026</a:t>
             </a:fld>
             <a:endParaRPr lang="en-US"/>
           </a:p>
@@ -671,7 +677,7 @@
           <a:p>
             <a:fld id="{AC601F0D-9A74-4BCF-936C-28269B3A442B}" type="datetimeFigureOut">
               <a:rPr lang="en-US" smtClean="0"/>
-              <a:t>8/28/2026</a:t>
+              <a:t>8/29/2026</a:t>
             </a:fld>
             <a:endParaRPr lang="en-US"/>
           </a:p>
@@ -869,7 +875,7 @@
           <a:p>
             <a:fld id="{AC601F0D-9A74-4BCF-936C-28269B3A442B}" type="datetimeFigureOut">
               <a:rPr lang="en-US" smtClean="0"/>
-              <a:t>8/28/2026</a:t>
+              <a:t>8/29/2026</a:t>
             </a:fld>
             <a:endParaRPr lang="en-US"/>
           </a:p>
@@ -1144,7 +1150,7 @@
           <a:p>
             <a:fld id="{AC601F0D-9A74-4BCF-936C-28269B3A442B}" type="datetimeFigureOut">
               <a:rPr lang="en-US" smtClean="0"/>
-              <a:t>8/28/2026</a:t>
+              <a:t>8/29/2026</a:t>
             </a:fld>
             <a:endParaRPr lang="en-US"/>
           </a:p>
@@ -1409,7 +1415,7 @@
           <a:p>
             <a:fld id="{AC601F0D-9A74-4BCF-936C-28269B3A442B}" type="datetimeFigureOut">
               <a:rPr lang="en-US" smtClean="0"/>
-              <a:t>8/28/2026</a:t>
+              <a:t>8/29/2026</a:t>
             </a:fld>
             <a:endParaRPr lang="en-US"/>
           </a:p>
@@ -1821,7 +1827,7 @@
           <a:p>
             <a:fld id="{AC601F0D-9A74-4BCF-936C-28269B3A442B}" type="datetimeFigureOut">
               <a:rPr lang="en-US" smtClean="0"/>
-              <a:t>8/28/2026</a:t>
+              <a:t>8/29/2026</a:t>
             </a:fld>
             <a:endParaRPr lang="en-US"/>
           </a:p>
@@ -1962,7 +1968,7 @@
           <a:p>
             <a:fld id="{AC601F0D-9A74-4BCF-936C-28269B3A442B}" type="datetimeFigureOut">
               <a:rPr lang="en-US" smtClean="0"/>
-              <a:t>8/28/2026</a:t>
+              <a:t>8/29/2026</a:t>
             </a:fld>
             <a:endParaRPr lang="en-US"/>
           </a:p>
@@ -2075,7 +2081,7 @@
           <a:p>
             <a:fld id="{AC601F0D-9A74-4BCF-936C-28269B3A442B}" type="datetimeFigureOut">
               <a:rPr lang="en-US" smtClean="0"/>
-              <a:t>8/28/2026</a:t>
+              <a:t>8/29/2026</a:t>
             </a:fld>
             <a:endParaRPr lang="en-US"/>
           </a:p>
@@ -2386,7 +2392,7 @@
           <a:p>
             <a:fld id="{AC601F0D-9A74-4BCF-936C-28269B3A442B}" type="datetimeFigureOut">
               <a:rPr lang="en-US" smtClean="0"/>
-              <a:t>8/28/2026</a:t>
+              <a:t>8/29/2026</a:t>
             </a:fld>
             <a:endParaRPr lang="en-US"/>
           </a:p>
@@ -2674,7 +2680,7 @@
           <a:p>
             <a:fld id="{AC601F0D-9A74-4BCF-936C-28269B3A442B}" type="datetimeFigureOut">
               <a:rPr lang="en-US" smtClean="0"/>
-              <a:t>8/28/2026</a:t>
+              <a:t>8/29/2026</a:t>
             </a:fld>
             <a:endParaRPr lang="en-US"/>
           </a:p>
@@ -2915,7 +2921,7 @@
           <a:p>
             <a:fld id="{AC601F0D-9A74-4BCF-936C-28269B3A442B}" type="datetimeFigureOut">
               <a:rPr lang="en-US" smtClean="0"/>
-              <a:t>8/28/2026</a:t>
+              <a:t>8/29/2026</a:t>
             </a:fld>
             <a:endParaRPr lang="en-US"/>
           </a:p>
@@ -3320,169 +3326,6 @@
   <p:cSld>
     <p:spTree>
       <p:nvGrpSpPr>
-        <p:cNvPr id="1" name="">
-          <a:extLst>
-            <a:ext uri="{FF2B5EF4-FFF2-40B4-BE49-F238E27FC236}">
-              <a16:creationId xmlns:a16="http://schemas.microsoft.com/office/drawing/2014/main" id="{F5176255-BC0E-122C-B49F-2C1D5431F5BE}"/>
-            </a:ext>
-          </a:extLst>
-        </p:cNvPr>
-        <p:cNvGrpSpPr/>
-        <p:nvPr/>
-      </p:nvGrpSpPr>
-      <p:grpSpPr>
-        <a:xfrm>
-          <a:off x="0" y="0"/>
-          <a:ext cx="0" cy="0"/>
-          <a:chOff x="0" y="0"/>
-          <a:chExt cx="0" cy="0"/>
-        </a:xfrm>
-      </p:grpSpPr>
-      <p:sp>
-        <p:nvSpPr>
-          <p:cNvPr id="4" name="Title 3">
-            <a:extLst>
-              <a:ext uri="{FF2B5EF4-FFF2-40B4-BE49-F238E27FC236}">
-                <a16:creationId xmlns:a16="http://schemas.microsoft.com/office/drawing/2014/main" id="{6347EB4E-C10B-70F0-B859-4D281F4E7BC0}"/>
-              </a:ext>
-            </a:extLst>
-          </p:cNvPr>
-          <p:cNvSpPr>
-            <a:spLocks noGrp="1"/>
-          </p:cNvSpPr>
-          <p:nvPr>
-            <p:ph type="ctrTitle"/>
-          </p:nvPr>
-        </p:nvSpPr>
-        <p:spPr>
-          <a:xfrm>
-            <a:off x="1524000" y="1915465"/>
-            <a:ext cx="9144000" cy="2387600"/>
-          </a:xfrm>
-        </p:spPr>
-        <p:txBody>
-          <a:bodyPr/>
-          <a:lstStyle/>
-          <a:p>
-            <a:r>
-              <a:rPr lang="en-US" b="1" dirty="0"/>
-              <a:t>STATE MACHINE</a:t>
-            </a:r>
-            <a:br>
-              <a:rPr lang="en-US" b="1" dirty="0"/>
-            </a:br>
-            <a:r>
-              <a:rPr lang="en-US" b="1" dirty="0"/>
-              <a:t>TEMPLATE</a:t>
-            </a:r>
-          </a:p>
-        </p:txBody>
-      </p:sp>
-    </p:spTree>
-    <p:extLst>
-      <p:ext uri="{BB962C8B-B14F-4D97-AF65-F5344CB8AC3E}">
-        <p14:creationId xmlns:p14="http://schemas.microsoft.com/office/powerpoint/2010/main" val="1723783782"/>
-      </p:ext>
-    </p:extLst>
-  </p:cSld>
-  <p:clrMapOvr>
-    <a:masterClrMapping/>
-  </p:clrMapOvr>
-</p:sld>
-</file>
-
-<file path=ppt/slides/slide2.xml><?xml version="1.0" encoding="utf-8"?>
-<p:sld xmlns:a="http://schemas.openxmlformats.org/drawingml/2006/main" xmlns:r="http://schemas.openxmlformats.org/officeDocument/2006/relationships" xmlns:p="http://schemas.openxmlformats.org/presentationml/2006/main">
-  <p:cSld>
-    <p:spTree>
-      <p:nvGrpSpPr>
-        <p:cNvPr id="1" name=""/>
-        <p:cNvGrpSpPr/>
-        <p:nvPr/>
-      </p:nvGrpSpPr>
-      <p:grpSpPr>
-        <a:xfrm>
-          <a:off x="0" y="0"/>
-          <a:ext cx="0" cy="0"/>
-          <a:chOff x="0" y="0"/>
-          <a:chExt cx="0" cy="0"/>
-        </a:xfrm>
-      </p:grpSpPr>
-      <p:sp>
-        <p:nvSpPr>
-          <p:cNvPr id="2" name="Title 1">
-            <a:extLst>
-              <a:ext uri="{FF2B5EF4-FFF2-40B4-BE49-F238E27FC236}">
-                <a16:creationId xmlns:a16="http://schemas.microsoft.com/office/drawing/2014/main" id="{82130CCB-5B8E-0723-710D-68EE849107C7}"/>
-              </a:ext>
-            </a:extLst>
-          </p:cNvPr>
-          <p:cNvSpPr>
-            <a:spLocks noGrp="1"/>
-          </p:cNvSpPr>
-          <p:nvPr>
-            <p:ph type="title"/>
-          </p:nvPr>
-        </p:nvSpPr>
-        <p:spPr/>
-        <p:txBody>
-          <a:bodyPr/>
-          <a:lstStyle/>
-          <a:p>
-            <a:endParaRPr lang="en-US" dirty="0"/>
-          </a:p>
-        </p:txBody>
-      </p:sp>
-      <p:pic>
-        <p:nvPicPr>
-          <p:cNvPr id="5" name="Content Placeholder 4">
-            <a:extLst>
-              <a:ext uri="{FF2B5EF4-FFF2-40B4-BE49-F238E27FC236}">
-                <a16:creationId xmlns:a16="http://schemas.microsoft.com/office/drawing/2014/main" id="{B958AB78-5981-7FBF-FFB8-A1EA125C014C}"/>
-              </a:ext>
-            </a:extLst>
-          </p:cNvPr>
-          <p:cNvPicPr>
-            <a:picLocks noGrp="1" noChangeAspect="1"/>
-          </p:cNvPicPr>
-          <p:nvPr>
-            <p:ph idx="1"/>
-          </p:nvPr>
-        </p:nvPicPr>
-        <p:blipFill>
-          <a:blip r:embed="rId2"/>
-          <a:stretch>
-            <a:fillRect/>
-          </a:stretch>
-        </p:blipFill>
-        <p:spPr>
-          <a:xfrm>
-            <a:off x="344804" y="365125"/>
-            <a:ext cx="11157785" cy="5708333"/>
-          </a:xfrm>
-          <a:prstGeom prst="rect">
-            <a:avLst/>
-          </a:prstGeom>
-        </p:spPr>
-      </p:pic>
-    </p:spTree>
-    <p:extLst>
-      <p:ext uri="{BB962C8B-B14F-4D97-AF65-F5344CB8AC3E}">
-        <p14:creationId xmlns:p14="http://schemas.microsoft.com/office/powerpoint/2010/main" val="1301629143"/>
-      </p:ext>
-    </p:extLst>
-  </p:cSld>
-  <p:clrMapOvr>
-    <a:masterClrMapping/>
-  </p:clrMapOvr>
-</p:sld>
-</file>
-
-<file path=ppt/slides/slide3.xml><?xml version="1.0" encoding="utf-8"?>
-<p:sld xmlns:a="http://schemas.openxmlformats.org/drawingml/2006/main" xmlns:r="http://schemas.openxmlformats.org/officeDocument/2006/relationships" xmlns:p="http://schemas.openxmlformats.org/presentationml/2006/main">
-  <p:cSld>
-    <p:spTree>
-      <p:nvGrpSpPr>
         <p:cNvPr id="1" name=""/>
         <p:cNvGrpSpPr/>
         <p:nvPr/>
@@ -3497,17 +3340,19 @@
       </p:grpSpPr>
       <p:pic>
         <p:nvPicPr>
-          <p:cNvPr id="5" name="Picture 4">
-            <a:extLst>
-              <a:ext uri="{FF2B5EF4-FFF2-40B4-BE49-F238E27FC236}">
-                <a16:creationId xmlns:a16="http://schemas.microsoft.com/office/drawing/2014/main" id="{B62B9724-6C01-C0AF-9335-41E0B848DFE2}"/>
+          <p:cNvPr id="5" name="Content Placeholder 4">
+            <a:extLst>
+              <a:ext uri="{FF2B5EF4-FFF2-40B4-BE49-F238E27FC236}">
+                <a16:creationId xmlns:a16="http://schemas.microsoft.com/office/drawing/2014/main" id="{37ECDA22-7BBE-66CE-63D9-C340E49ED129}"/>
               </a:ext>
             </a:extLst>
           </p:cNvPr>
           <p:cNvPicPr>
-            <a:picLocks noChangeAspect="1"/>
+            <a:picLocks noGrp="1" noChangeAspect="1"/>
           </p:cNvPicPr>
-          <p:nvPr/>
+          <p:nvPr>
+            <p:ph idx="1"/>
+          </p:nvPr>
         </p:nvPicPr>
         <p:blipFill>
           <a:blip r:embed="rId2"/>
@@ -3517,8 +3362,8 @@
         </p:blipFill>
         <p:spPr>
           <a:xfrm>
-            <a:off x="201419" y="533149"/>
-            <a:ext cx="11789162" cy="5791702"/>
+            <a:off x="1806650" y="1253331"/>
+            <a:ext cx="7904930" cy="4351338"/>
           </a:xfrm>
           <a:prstGeom prst="rect">
             <a:avLst/>
@@ -3528,7 +3373,7 @@
     </p:spTree>
     <p:extLst>
       <p:ext uri="{BB962C8B-B14F-4D97-AF65-F5344CB8AC3E}">
-        <p14:creationId xmlns:p14="http://schemas.microsoft.com/office/powerpoint/2010/main" val="2504438264"/>
+        <p14:creationId xmlns:p14="http://schemas.microsoft.com/office/powerpoint/2010/main" val="3482243494"/>
       </p:ext>
     </p:extLst>
   </p:cSld>
@@ -3538,7 +3383,7 @@
 </p:sld>
 </file>
 
-<file path=ppt/slides/slide4.xml><?xml version="1.0" encoding="utf-8"?>
+<file path=ppt/slides/slide10.xml><?xml version="1.0" encoding="utf-8"?>
 <p:sld xmlns:a="http://schemas.openxmlformats.org/drawingml/2006/main" xmlns:r="http://schemas.openxmlformats.org/officeDocument/2006/relationships" xmlns:p="http://schemas.openxmlformats.org/presentationml/2006/main">
   <p:cSld>
     <p:spTree>
@@ -4464,7 +4309,7 @@
 </p:sld>
 </file>
 
-<file path=ppt/slides/slide5.xml><?xml version="1.0" encoding="utf-8"?>
+<file path=ppt/slides/slide11.xml><?xml version="1.0" encoding="utf-8"?>
 <p:sld xmlns:a="http://schemas.openxmlformats.org/drawingml/2006/main" xmlns:r="http://schemas.openxmlformats.org/officeDocument/2006/relationships" xmlns:p="http://schemas.openxmlformats.org/presentationml/2006/main">
   <p:cSld>
     <p:spTree>
@@ -4534,7 +4379,7 @@
 </p:sld>
 </file>
 
-<file path=ppt/slides/slide6.xml><?xml version="1.0" encoding="utf-8"?>
+<file path=ppt/slides/slide12.xml><?xml version="1.0" encoding="utf-8"?>
 <p:sld xmlns:a="http://schemas.openxmlformats.org/drawingml/2006/main" xmlns:r="http://schemas.openxmlformats.org/officeDocument/2006/relationships" xmlns:p="http://schemas.openxmlformats.org/presentationml/2006/main">
   <p:cSld>
     <p:spTree>
@@ -4594,7 +4439,7 @@
 </p:sld>
 </file>
 
-<file path=ppt/slides/slide7.xml><?xml version="1.0" encoding="utf-8"?>
+<file path=ppt/slides/slide13.xml><?xml version="1.0" encoding="utf-8"?>
 <p:sld xmlns:a="http://schemas.openxmlformats.org/drawingml/2006/main" xmlns:r="http://schemas.openxmlformats.org/officeDocument/2006/relationships" xmlns:p="http://schemas.openxmlformats.org/presentationml/2006/main">
   <p:cSld>
     <p:spTree>
@@ -6503,6 +6348,725 @@
     <p:extLst>
       <p:ext uri="{BB962C8B-B14F-4D97-AF65-F5344CB8AC3E}">
         <p14:creationId xmlns:p14="http://schemas.microsoft.com/office/powerpoint/2010/main" val="3280859554"/>
+      </p:ext>
+    </p:extLst>
+  </p:cSld>
+  <p:clrMapOvr>
+    <a:masterClrMapping/>
+  </p:clrMapOvr>
+</p:sld>
+</file>
+
+<file path=ppt/slides/slide2.xml><?xml version="1.0" encoding="utf-8"?>
+<p:sld xmlns:a="http://schemas.openxmlformats.org/drawingml/2006/main" xmlns:r="http://schemas.openxmlformats.org/officeDocument/2006/relationships" xmlns:p="http://schemas.openxmlformats.org/presentationml/2006/main">
+  <p:cSld>
+    <p:spTree>
+      <p:nvGrpSpPr>
+        <p:cNvPr id="1" name=""/>
+        <p:cNvGrpSpPr/>
+        <p:nvPr/>
+      </p:nvGrpSpPr>
+      <p:grpSpPr>
+        <a:xfrm>
+          <a:off x="0" y="0"/>
+          <a:ext cx="0" cy="0"/>
+          <a:chOff x="0" y="0"/>
+          <a:chExt cx="0" cy="0"/>
+        </a:xfrm>
+      </p:grpSpPr>
+      <p:pic>
+        <p:nvPicPr>
+          <p:cNvPr id="9" name="Picture 8">
+            <a:extLst>
+              <a:ext uri="{FF2B5EF4-FFF2-40B4-BE49-F238E27FC236}">
+                <a16:creationId xmlns:a16="http://schemas.microsoft.com/office/drawing/2014/main" id="{4D1AB7C7-3CD2-E68C-EDC7-9E54D3AFE161}"/>
+              </a:ext>
+            </a:extLst>
+          </p:cNvPr>
+          <p:cNvPicPr>
+            <a:picLocks noChangeAspect="1"/>
+          </p:cNvPicPr>
+          <p:nvPr/>
+        </p:nvPicPr>
+        <p:blipFill>
+          <a:blip r:embed="rId2"/>
+          <a:stretch>
+            <a:fillRect/>
+          </a:stretch>
+        </p:blipFill>
+        <p:spPr>
+          <a:xfrm>
+            <a:off x="2560467" y="634539"/>
+            <a:ext cx="7071065" cy="5588921"/>
+          </a:xfrm>
+          <a:prstGeom prst="rect">
+            <a:avLst/>
+          </a:prstGeom>
+        </p:spPr>
+      </p:pic>
+    </p:spTree>
+    <p:extLst>
+      <p:ext uri="{BB962C8B-B14F-4D97-AF65-F5344CB8AC3E}">
+        <p14:creationId xmlns:p14="http://schemas.microsoft.com/office/powerpoint/2010/main" val="3064630199"/>
+      </p:ext>
+    </p:extLst>
+  </p:cSld>
+  <p:clrMapOvr>
+    <a:masterClrMapping/>
+  </p:clrMapOvr>
+</p:sld>
+</file>
+
+<file path=ppt/slides/slide3.xml><?xml version="1.0" encoding="utf-8"?>
+<p:sld xmlns:a="http://schemas.openxmlformats.org/drawingml/2006/main" xmlns:r="http://schemas.openxmlformats.org/officeDocument/2006/relationships" xmlns:p="http://schemas.openxmlformats.org/presentationml/2006/main">
+  <p:cSld>
+    <p:spTree>
+      <p:nvGrpSpPr>
+        <p:cNvPr id="1" name="">
+          <a:extLst>
+            <a:ext uri="{FF2B5EF4-FFF2-40B4-BE49-F238E27FC236}">
+              <a16:creationId xmlns:a16="http://schemas.microsoft.com/office/drawing/2014/main" id="{DBF2ED10-C81C-BB48-4C08-F4C16D803A42}"/>
+            </a:ext>
+          </a:extLst>
+        </p:cNvPr>
+        <p:cNvGrpSpPr/>
+        <p:nvPr/>
+      </p:nvGrpSpPr>
+      <p:grpSpPr>
+        <a:xfrm>
+          <a:off x="0" y="0"/>
+          <a:ext cx="0" cy="0"/>
+          <a:chOff x="0" y="0"/>
+          <a:chExt cx="0" cy="0"/>
+        </a:xfrm>
+      </p:grpSpPr>
+      <p:pic>
+        <p:nvPicPr>
+          <p:cNvPr id="3" name="Picture 2">
+            <a:extLst>
+              <a:ext uri="{FF2B5EF4-FFF2-40B4-BE49-F238E27FC236}">
+                <a16:creationId xmlns:a16="http://schemas.microsoft.com/office/drawing/2014/main" id="{FC76C4C5-9FFF-132A-4F10-8249B232E7D7}"/>
+              </a:ext>
+            </a:extLst>
+          </p:cNvPr>
+          <p:cNvPicPr>
+            <a:picLocks noChangeAspect="1"/>
+          </p:cNvPicPr>
+          <p:nvPr/>
+        </p:nvPicPr>
+        <p:blipFill>
+          <a:blip r:embed="rId2"/>
+          <a:stretch>
+            <a:fillRect/>
+          </a:stretch>
+        </p:blipFill>
+        <p:spPr>
+          <a:xfrm>
+            <a:off x="0" y="1407866"/>
+            <a:ext cx="12192000" cy="4042267"/>
+          </a:xfrm>
+          <a:prstGeom prst="rect">
+            <a:avLst/>
+          </a:prstGeom>
+        </p:spPr>
+      </p:pic>
+      <p:sp>
+        <p:nvSpPr>
+          <p:cNvPr id="4" name="TextBox 3">
+            <a:extLst>
+              <a:ext uri="{FF2B5EF4-FFF2-40B4-BE49-F238E27FC236}">
+                <a16:creationId xmlns:a16="http://schemas.microsoft.com/office/drawing/2014/main" id="{F8695D5B-41E5-9553-56B1-783EA4E3CB86}"/>
+              </a:ext>
+            </a:extLst>
+          </p:cNvPr>
+          <p:cNvSpPr txBox="1"/>
+          <p:nvPr/>
+        </p:nvSpPr>
+        <p:spPr>
+          <a:xfrm>
+            <a:off x="429471" y="347884"/>
+            <a:ext cx="2633734" cy="523220"/>
+          </a:xfrm>
+          <a:prstGeom prst="rect">
+            <a:avLst/>
+          </a:prstGeom>
+          <a:noFill/>
+        </p:spPr>
+        <p:txBody>
+          <a:bodyPr wrap="none" rtlCol="0">
+            <a:spAutoFit/>
+          </a:bodyPr>
+          <a:lstStyle/>
+          <a:p>
+            <a:r>
+              <a:rPr lang="en-US" sz="2800" dirty="0">
+                <a:highlight>
+                  <a:srgbClr val="FFFF00"/>
+                </a:highlight>
+              </a:rPr>
+              <a:t>Acquisition State</a:t>
+            </a:r>
+            <a:endParaRPr lang="LID4096" sz="2800" dirty="0">
+              <a:highlight>
+                <a:srgbClr val="FFFF00"/>
+              </a:highlight>
+            </a:endParaRPr>
+          </a:p>
+        </p:txBody>
+      </p:sp>
+    </p:spTree>
+    <p:extLst>
+      <p:ext uri="{BB962C8B-B14F-4D97-AF65-F5344CB8AC3E}">
+        <p14:creationId xmlns:p14="http://schemas.microsoft.com/office/powerpoint/2010/main" val="899626970"/>
+      </p:ext>
+    </p:extLst>
+  </p:cSld>
+  <p:clrMapOvr>
+    <a:masterClrMapping/>
+  </p:clrMapOvr>
+</p:sld>
+</file>
+
+<file path=ppt/slides/slide4.xml><?xml version="1.0" encoding="utf-8"?>
+<p:sld xmlns:a="http://schemas.openxmlformats.org/drawingml/2006/main" xmlns:r="http://schemas.openxmlformats.org/officeDocument/2006/relationships" xmlns:p="http://schemas.openxmlformats.org/presentationml/2006/main">
+  <p:cSld>
+    <p:spTree>
+      <p:nvGrpSpPr>
+        <p:cNvPr id="1" name="">
+          <a:extLst>
+            <a:ext uri="{FF2B5EF4-FFF2-40B4-BE49-F238E27FC236}">
+              <a16:creationId xmlns:a16="http://schemas.microsoft.com/office/drawing/2014/main" id="{08791EB2-972A-877A-E685-AB19496375CF}"/>
+            </a:ext>
+          </a:extLst>
+        </p:cNvPr>
+        <p:cNvGrpSpPr/>
+        <p:nvPr/>
+      </p:nvGrpSpPr>
+      <p:grpSpPr>
+        <a:xfrm>
+          <a:off x="0" y="0"/>
+          <a:ext cx="0" cy="0"/>
+          <a:chOff x="0" y="0"/>
+          <a:chExt cx="0" cy="0"/>
+        </a:xfrm>
+      </p:grpSpPr>
+      <p:pic>
+        <p:nvPicPr>
+          <p:cNvPr id="3" name="Picture 2">
+            <a:extLst>
+              <a:ext uri="{FF2B5EF4-FFF2-40B4-BE49-F238E27FC236}">
+                <a16:creationId xmlns:a16="http://schemas.microsoft.com/office/drawing/2014/main" id="{6E26D327-F51D-1B57-290E-62909D5FC09D}"/>
+              </a:ext>
+            </a:extLst>
+          </p:cNvPr>
+          <p:cNvPicPr>
+            <a:picLocks noChangeAspect="1"/>
+          </p:cNvPicPr>
+          <p:nvPr/>
+        </p:nvPicPr>
+        <p:blipFill>
+          <a:blip r:embed="rId2"/>
+          <a:stretch>
+            <a:fillRect/>
+          </a:stretch>
+        </p:blipFill>
+        <p:spPr>
+          <a:xfrm>
+            <a:off x="0" y="1407866"/>
+            <a:ext cx="12192000" cy="4042267"/>
+          </a:xfrm>
+          <a:prstGeom prst="rect">
+            <a:avLst/>
+          </a:prstGeom>
+        </p:spPr>
+      </p:pic>
+      <p:sp>
+        <p:nvSpPr>
+          <p:cNvPr id="5" name="TextBox 4">
+            <a:extLst>
+              <a:ext uri="{FF2B5EF4-FFF2-40B4-BE49-F238E27FC236}">
+                <a16:creationId xmlns:a16="http://schemas.microsoft.com/office/drawing/2014/main" id="{CF3053A5-D112-F1E4-E4A4-DE888EDA1D8F}"/>
+              </a:ext>
+            </a:extLst>
+          </p:cNvPr>
+          <p:cNvSpPr txBox="1"/>
+          <p:nvPr/>
+        </p:nvSpPr>
+        <p:spPr>
+          <a:xfrm>
+            <a:off x="429471" y="347884"/>
+            <a:ext cx="2183162" cy="523220"/>
+          </a:xfrm>
+          <a:prstGeom prst="rect">
+            <a:avLst/>
+          </a:prstGeom>
+          <a:noFill/>
+        </p:spPr>
+        <p:txBody>
+          <a:bodyPr wrap="none" rtlCol="0">
+            <a:spAutoFit/>
+          </a:bodyPr>
+          <a:lstStyle/>
+          <a:p>
+            <a:r>
+              <a:rPr lang="en-US" sz="2800" dirty="0">
+                <a:highlight>
+                  <a:srgbClr val="FFFF00"/>
+                </a:highlight>
+              </a:rPr>
+              <a:t>Analysis State</a:t>
+            </a:r>
+            <a:endParaRPr lang="LID4096" sz="2800" dirty="0">
+              <a:highlight>
+                <a:srgbClr val="FFFF00"/>
+              </a:highlight>
+            </a:endParaRPr>
+          </a:p>
+        </p:txBody>
+      </p:sp>
+    </p:spTree>
+    <p:extLst>
+      <p:ext uri="{BB962C8B-B14F-4D97-AF65-F5344CB8AC3E}">
+        <p14:creationId xmlns:p14="http://schemas.microsoft.com/office/powerpoint/2010/main" val="3696828398"/>
+      </p:ext>
+    </p:extLst>
+  </p:cSld>
+  <p:clrMapOvr>
+    <a:masterClrMapping/>
+  </p:clrMapOvr>
+</p:sld>
+</file>
+
+<file path=ppt/slides/slide5.xml><?xml version="1.0" encoding="utf-8"?>
+<p:sld xmlns:a="http://schemas.openxmlformats.org/drawingml/2006/main" xmlns:r="http://schemas.openxmlformats.org/officeDocument/2006/relationships" xmlns:p="http://schemas.openxmlformats.org/presentationml/2006/main">
+  <p:cSld>
+    <p:spTree>
+      <p:nvGrpSpPr>
+        <p:cNvPr id="1" name=""/>
+        <p:cNvGrpSpPr/>
+        <p:nvPr/>
+      </p:nvGrpSpPr>
+      <p:grpSpPr>
+        <a:xfrm>
+          <a:off x="0" y="0"/>
+          <a:ext cx="0" cy="0"/>
+          <a:chOff x="0" y="0"/>
+          <a:chExt cx="0" cy="0"/>
+        </a:xfrm>
+      </p:grpSpPr>
+      <p:pic>
+        <p:nvPicPr>
+          <p:cNvPr id="5" name="Picture 4">
+            <a:extLst>
+              <a:ext uri="{FF2B5EF4-FFF2-40B4-BE49-F238E27FC236}">
+                <a16:creationId xmlns:a16="http://schemas.microsoft.com/office/drawing/2014/main" id="{3D91E601-C24B-33D2-D19A-1FC456BDD2B4}"/>
+              </a:ext>
+            </a:extLst>
+          </p:cNvPr>
+          <p:cNvPicPr>
+            <a:picLocks noChangeAspect="1"/>
+          </p:cNvPicPr>
+          <p:nvPr/>
+        </p:nvPicPr>
+        <p:blipFill>
+          <a:blip r:embed="rId2"/>
+          <a:stretch>
+            <a:fillRect/>
+          </a:stretch>
+        </p:blipFill>
+        <p:spPr>
+          <a:xfrm>
+            <a:off x="0" y="1407866"/>
+            <a:ext cx="12192000" cy="4042267"/>
+          </a:xfrm>
+          <a:prstGeom prst="rect">
+            <a:avLst/>
+          </a:prstGeom>
+        </p:spPr>
+      </p:pic>
+      <p:sp>
+        <p:nvSpPr>
+          <p:cNvPr id="7" name="TextBox 6">
+            <a:extLst>
+              <a:ext uri="{FF2B5EF4-FFF2-40B4-BE49-F238E27FC236}">
+                <a16:creationId xmlns:a16="http://schemas.microsoft.com/office/drawing/2014/main" id="{30258D74-9F4C-53EA-7B95-54520E278AFF}"/>
+              </a:ext>
+            </a:extLst>
+          </p:cNvPr>
+          <p:cNvSpPr txBox="1"/>
+          <p:nvPr/>
+        </p:nvSpPr>
+        <p:spPr>
+          <a:xfrm>
+            <a:off x="429471" y="347884"/>
+            <a:ext cx="2194832" cy="523220"/>
+          </a:xfrm>
+          <a:prstGeom prst="rect">
+            <a:avLst/>
+          </a:prstGeom>
+          <a:noFill/>
+        </p:spPr>
+        <p:txBody>
+          <a:bodyPr wrap="none" rtlCol="0">
+            <a:spAutoFit/>
+          </a:bodyPr>
+          <a:lstStyle/>
+          <a:p>
+            <a:r>
+              <a:rPr lang="en-US" sz="2800" dirty="0" err="1">
+                <a:highlight>
+                  <a:srgbClr val="FFFF00"/>
+                </a:highlight>
+              </a:rPr>
+              <a:t>DataLog</a:t>
+            </a:r>
+            <a:r>
+              <a:rPr lang="en-US" sz="2800" dirty="0">
+                <a:highlight>
+                  <a:srgbClr val="FFFF00"/>
+                </a:highlight>
+              </a:rPr>
+              <a:t> State</a:t>
+            </a:r>
+            <a:endParaRPr lang="LID4096" sz="2800" dirty="0">
+              <a:highlight>
+                <a:srgbClr val="FFFF00"/>
+              </a:highlight>
+            </a:endParaRPr>
+          </a:p>
+        </p:txBody>
+      </p:sp>
+    </p:spTree>
+    <p:extLst>
+      <p:ext uri="{BB962C8B-B14F-4D97-AF65-F5344CB8AC3E}">
+        <p14:creationId xmlns:p14="http://schemas.microsoft.com/office/powerpoint/2010/main" val="246931935"/>
+      </p:ext>
+    </p:extLst>
+  </p:cSld>
+  <p:clrMapOvr>
+    <a:masterClrMapping/>
+  </p:clrMapOvr>
+</p:sld>
+</file>
+
+<file path=ppt/slides/slide6.xml><?xml version="1.0" encoding="utf-8"?>
+<p:sld xmlns:a="http://schemas.openxmlformats.org/drawingml/2006/main" xmlns:r="http://schemas.openxmlformats.org/officeDocument/2006/relationships" xmlns:p="http://schemas.openxmlformats.org/presentationml/2006/main">
+  <p:cSld>
+    <p:spTree>
+      <p:nvGrpSpPr>
+        <p:cNvPr id="1" name=""/>
+        <p:cNvGrpSpPr/>
+        <p:nvPr/>
+      </p:nvGrpSpPr>
+      <p:grpSpPr>
+        <a:xfrm>
+          <a:off x="0" y="0"/>
+          <a:ext cx="0" cy="0"/>
+          <a:chOff x="0" y="0"/>
+          <a:chExt cx="0" cy="0"/>
+        </a:xfrm>
+      </p:grpSpPr>
+      <p:pic>
+        <p:nvPicPr>
+          <p:cNvPr id="5" name="Picture 4">
+            <a:extLst>
+              <a:ext uri="{FF2B5EF4-FFF2-40B4-BE49-F238E27FC236}">
+                <a16:creationId xmlns:a16="http://schemas.microsoft.com/office/drawing/2014/main" id="{1B4675A5-F98D-B787-E77A-3CCB9AD75600}"/>
+              </a:ext>
+            </a:extLst>
+          </p:cNvPr>
+          <p:cNvPicPr>
+            <a:picLocks noChangeAspect="1"/>
+          </p:cNvPicPr>
+          <p:nvPr/>
+        </p:nvPicPr>
+        <p:blipFill>
+          <a:blip r:embed="rId2"/>
+          <a:stretch>
+            <a:fillRect/>
+          </a:stretch>
+        </p:blipFill>
+        <p:spPr>
+          <a:xfrm>
+            <a:off x="0" y="1407866"/>
+            <a:ext cx="12192000" cy="4042267"/>
+          </a:xfrm>
+          <a:prstGeom prst="rect">
+            <a:avLst/>
+          </a:prstGeom>
+        </p:spPr>
+      </p:pic>
+      <p:sp>
+        <p:nvSpPr>
+          <p:cNvPr id="7" name="TextBox 6">
+            <a:extLst>
+              <a:ext uri="{FF2B5EF4-FFF2-40B4-BE49-F238E27FC236}">
+                <a16:creationId xmlns:a16="http://schemas.microsoft.com/office/drawing/2014/main" id="{754A35A8-36F0-C0DA-97F1-A71ADA7202BB}"/>
+              </a:ext>
+            </a:extLst>
+          </p:cNvPr>
+          <p:cNvSpPr txBox="1"/>
+          <p:nvPr/>
+        </p:nvSpPr>
+        <p:spPr>
+          <a:xfrm>
+            <a:off x="429471" y="347884"/>
+            <a:ext cx="2686633" cy="523220"/>
+          </a:xfrm>
+          <a:prstGeom prst="rect">
+            <a:avLst/>
+          </a:prstGeom>
+          <a:noFill/>
+        </p:spPr>
+        <p:txBody>
+          <a:bodyPr wrap="none" rtlCol="0">
+            <a:spAutoFit/>
+          </a:bodyPr>
+          <a:lstStyle/>
+          <a:p>
+            <a:r>
+              <a:rPr lang="en-US" sz="2800" dirty="0">
+                <a:highlight>
+                  <a:srgbClr val="FFFF00"/>
+                </a:highlight>
+              </a:rPr>
+              <a:t>Time Check State</a:t>
+            </a:r>
+            <a:endParaRPr lang="LID4096" sz="2800" dirty="0">
+              <a:highlight>
+                <a:srgbClr val="FFFF00"/>
+              </a:highlight>
+            </a:endParaRPr>
+          </a:p>
+        </p:txBody>
+      </p:sp>
+    </p:spTree>
+    <p:extLst>
+      <p:ext uri="{BB962C8B-B14F-4D97-AF65-F5344CB8AC3E}">
+        <p14:creationId xmlns:p14="http://schemas.microsoft.com/office/powerpoint/2010/main" val="3308819786"/>
+      </p:ext>
+    </p:extLst>
+  </p:cSld>
+  <p:clrMapOvr>
+    <a:masterClrMapping/>
+  </p:clrMapOvr>
+</p:sld>
+</file>
+
+<file path=ppt/slides/slide7.xml><?xml version="1.0" encoding="utf-8"?>
+<p:sld xmlns:a="http://schemas.openxmlformats.org/drawingml/2006/main" xmlns:r="http://schemas.openxmlformats.org/officeDocument/2006/relationships" xmlns:p="http://schemas.openxmlformats.org/presentationml/2006/main">
+  <p:cSld>
+    <p:spTree>
+      <p:nvGrpSpPr>
+        <p:cNvPr id="1" name="">
+          <a:extLst>
+            <a:ext uri="{FF2B5EF4-FFF2-40B4-BE49-F238E27FC236}">
+              <a16:creationId xmlns:a16="http://schemas.microsoft.com/office/drawing/2014/main" id="{F5176255-BC0E-122C-B49F-2C1D5431F5BE}"/>
+            </a:ext>
+          </a:extLst>
+        </p:cNvPr>
+        <p:cNvGrpSpPr/>
+        <p:nvPr/>
+      </p:nvGrpSpPr>
+      <p:grpSpPr>
+        <a:xfrm>
+          <a:off x="0" y="0"/>
+          <a:ext cx="0" cy="0"/>
+          <a:chOff x="0" y="0"/>
+          <a:chExt cx="0" cy="0"/>
+        </a:xfrm>
+      </p:grpSpPr>
+      <p:sp>
+        <p:nvSpPr>
+          <p:cNvPr id="4" name="Title 3">
+            <a:extLst>
+              <a:ext uri="{FF2B5EF4-FFF2-40B4-BE49-F238E27FC236}">
+                <a16:creationId xmlns:a16="http://schemas.microsoft.com/office/drawing/2014/main" id="{6347EB4E-C10B-70F0-B859-4D281F4E7BC0}"/>
+              </a:ext>
+            </a:extLst>
+          </p:cNvPr>
+          <p:cNvSpPr>
+            <a:spLocks noGrp="1"/>
+          </p:cNvSpPr>
+          <p:nvPr>
+            <p:ph type="ctrTitle"/>
+          </p:nvPr>
+        </p:nvSpPr>
+        <p:spPr>
+          <a:xfrm>
+            <a:off x="1524000" y="1915465"/>
+            <a:ext cx="9144000" cy="2387600"/>
+          </a:xfrm>
+        </p:spPr>
+        <p:txBody>
+          <a:bodyPr/>
+          <a:lstStyle/>
+          <a:p>
+            <a:r>
+              <a:rPr lang="en-US" b="1" dirty="0"/>
+              <a:t>STATE MACHINE</a:t>
+            </a:r>
+            <a:br>
+              <a:rPr lang="en-US" b="1" dirty="0"/>
+            </a:br>
+            <a:r>
+              <a:rPr lang="en-US" b="1" dirty="0"/>
+              <a:t>TEMPLATE</a:t>
+            </a:r>
+          </a:p>
+        </p:txBody>
+      </p:sp>
+    </p:spTree>
+    <p:extLst>
+      <p:ext uri="{BB962C8B-B14F-4D97-AF65-F5344CB8AC3E}">
+        <p14:creationId xmlns:p14="http://schemas.microsoft.com/office/powerpoint/2010/main" val="1723783782"/>
+      </p:ext>
+    </p:extLst>
+  </p:cSld>
+  <p:clrMapOvr>
+    <a:masterClrMapping/>
+  </p:clrMapOvr>
+</p:sld>
+</file>
+
+<file path=ppt/slides/slide8.xml><?xml version="1.0" encoding="utf-8"?>
+<p:sld xmlns:a="http://schemas.openxmlformats.org/drawingml/2006/main" xmlns:r="http://schemas.openxmlformats.org/officeDocument/2006/relationships" xmlns:p="http://schemas.openxmlformats.org/presentationml/2006/main">
+  <p:cSld>
+    <p:spTree>
+      <p:nvGrpSpPr>
+        <p:cNvPr id="1" name=""/>
+        <p:cNvGrpSpPr/>
+        <p:nvPr/>
+      </p:nvGrpSpPr>
+      <p:grpSpPr>
+        <a:xfrm>
+          <a:off x="0" y="0"/>
+          <a:ext cx="0" cy="0"/>
+          <a:chOff x="0" y="0"/>
+          <a:chExt cx="0" cy="0"/>
+        </a:xfrm>
+      </p:grpSpPr>
+      <p:sp>
+        <p:nvSpPr>
+          <p:cNvPr id="2" name="Title 1">
+            <a:extLst>
+              <a:ext uri="{FF2B5EF4-FFF2-40B4-BE49-F238E27FC236}">
+                <a16:creationId xmlns:a16="http://schemas.microsoft.com/office/drawing/2014/main" id="{82130CCB-5B8E-0723-710D-68EE849107C7}"/>
+              </a:ext>
+            </a:extLst>
+          </p:cNvPr>
+          <p:cNvSpPr>
+            <a:spLocks noGrp="1"/>
+          </p:cNvSpPr>
+          <p:nvPr>
+            <p:ph type="title"/>
+          </p:nvPr>
+        </p:nvSpPr>
+        <p:spPr/>
+        <p:txBody>
+          <a:bodyPr/>
+          <a:lstStyle/>
+          <a:p>
+            <a:endParaRPr lang="en-US" dirty="0"/>
+          </a:p>
+        </p:txBody>
+      </p:sp>
+      <p:pic>
+        <p:nvPicPr>
+          <p:cNvPr id="5" name="Content Placeholder 4">
+            <a:extLst>
+              <a:ext uri="{FF2B5EF4-FFF2-40B4-BE49-F238E27FC236}">
+                <a16:creationId xmlns:a16="http://schemas.microsoft.com/office/drawing/2014/main" id="{B958AB78-5981-7FBF-FFB8-A1EA125C014C}"/>
+              </a:ext>
+            </a:extLst>
+          </p:cNvPr>
+          <p:cNvPicPr>
+            <a:picLocks noGrp="1" noChangeAspect="1"/>
+          </p:cNvPicPr>
+          <p:nvPr>
+            <p:ph idx="1"/>
+          </p:nvPr>
+        </p:nvPicPr>
+        <p:blipFill>
+          <a:blip r:embed="rId2"/>
+          <a:stretch>
+            <a:fillRect/>
+          </a:stretch>
+        </p:blipFill>
+        <p:spPr>
+          <a:xfrm>
+            <a:off x="344804" y="365125"/>
+            <a:ext cx="11157785" cy="5708333"/>
+          </a:xfrm>
+          <a:prstGeom prst="rect">
+            <a:avLst/>
+          </a:prstGeom>
+        </p:spPr>
+      </p:pic>
+    </p:spTree>
+    <p:extLst>
+      <p:ext uri="{BB962C8B-B14F-4D97-AF65-F5344CB8AC3E}">
+        <p14:creationId xmlns:p14="http://schemas.microsoft.com/office/powerpoint/2010/main" val="1301629143"/>
+      </p:ext>
+    </p:extLst>
+  </p:cSld>
+  <p:clrMapOvr>
+    <a:masterClrMapping/>
+  </p:clrMapOvr>
+</p:sld>
+</file>
+
+<file path=ppt/slides/slide9.xml><?xml version="1.0" encoding="utf-8"?>
+<p:sld xmlns:a="http://schemas.openxmlformats.org/drawingml/2006/main" xmlns:r="http://schemas.openxmlformats.org/officeDocument/2006/relationships" xmlns:p="http://schemas.openxmlformats.org/presentationml/2006/main">
+  <p:cSld>
+    <p:spTree>
+      <p:nvGrpSpPr>
+        <p:cNvPr id="1" name=""/>
+        <p:cNvGrpSpPr/>
+        <p:nvPr/>
+      </p:nvGrpSpPr>
+      <p:grpSpPr>
+        <a:xfrm>
+          <a:off x="0" y="0"/>
+          <a:ext cx="0" cy="0"/>
+          <a:chOff x="0" y="0"/>
+          <a:chExt cx="0" cy="0"/>
+        </a:xfrm>
+      </p:grpSpPr>
+      <p:pic>
+        <p:nvPicPr>
+          <p:cNvPr id="5" name="Picture 4">
+            <a:extLst>
+              <a:ext uri="{FF2B5EF4-FFF2-40B4-BE49-F238E27FC236}">
+                <a16:creationId xmlns:a16="http://schemas.microsoft.com/office/drawing/2014/main" id="{B62B9724-6C01-C0AF-9335-41E0B848DFE2}"/>
+              </a:ext>
+            </a:extLst>
+          </p:cNvPr>
+          <p:cNvPicPr>
+            <a:picLocks noChangeAspect="1"/>
+          </p:cNvPicPr>
+          <p:nvPr/>
+        </p:nvPicPr>
+        <p:blipFill>
+          <a:blip r:embed="rId2"/>
+          <a:stretch>
+            <a:fillRect/>
+          </a:stretch>
+        </p:blipFill>
+        <p:spPr>
+          <a:xfrm>
+            <a:off x="201419" y="533149"/>
+            <a:ext cx="11789162" cy="5791702"/>
+          </a:xfrm>
+          <a:prstGeom prst="rect">
+            <a:avLst/>
+          </a:prstGeom>
+        </p:spPr>
+      </p:pic>
+    </p:spTree>
+    <p:extLst>
+      <p:ext uri="{BB962C8B-B14F-4D97-AF65-F5344CB8AC3E}">
+        <p14:creationId xmlns:p14="http://schemas.microsoft.com/office/powerpoint/2010/main" val="2504438264"/>
       </p:ext>
     </p:extLst>
   </p:cSld>
